--- a/week-08/presentations/ppts/day-02-capstone-discovery-prd.pptx
+++ b/week-08/presentations/ppts/day-02-capstone-discovery-prd.pptx
@@ -954,7 +954,7 @@
             </a:pPr>
             <a:r>
               <a:rPr/>
-              <a:t>“Engineer’s first 3 questions” test for §5 still applies.</a:t>
+              <a:t>“Engineer’s first 3 questions” test for Section 5 still applies.</a:t>
             </a:r>
           </a:p>
         </p:txBody>
@@ -5174,7 +5174,7 @@
             </a:pPr>
             <a:r>
               <a:rPr/>
-              <a:t>🧿 AI Assistance Pattern</a:t>
+              <a:t>🤖 AI Assistance Pattern</a:t>
             </a:r>
           </a:p>
         </p:txBody>
@@ -5246,7 +5246,7 @@
             </a:pPr>
             <a:r>
               <a:rPr/>
-              <a:t>👥 Activity 2 — PRD-Light §§1–4</a:t>
+              <a:t>👥 Activity 2 — PRD-Light Sections 1–4</a:t>
             </a:r>
           </a:p>
         </p:txBody>
@@ -5283,25 +5283,25 @@
             </a:pPr>
             <a:r>
               <a:rPr/>
-              <a:t>15 min: §1 + §2 (solo drafts → triad picks → AI tightens)</a:t>
-            </a:r>
-          </a:p>
-          <a:p>
-            <a:pPr lvl="0" indent="0" marL="0">
-              <a:buNone/>
-            </a:pPr>
-            <a:r>
-              <a:rPr/>
-              <a:t>15 min: §3 goals + non-goals</a:t>
-            </a:r>
-          </a:p>
-          <a:p>
-            <a:pPr lvl="0" indent="0" marL="0">
-              <a:buNone/>
-            </a:pPr>
-            <a:r>
-              <a:rPr/>
-              <a:t>10 min: §4 scope (in/out table)</a:t>
+              <a:t>15 min: Section 1 + Section 2 (solo drafts → triad picks → AI tightens)</a:t>
+            </a:r>
+          </a:p>
+          <a:p>
+            <a:pPr lvl="0" indent="0" marL="0">
+              <a:buNone/>
+            </a:pPr>
+            <a:r>
+              <a:rPr/>
+              <a:t>15 min: Section 3 goals + non-goals</a:t>
+            </a:r>
+          </a:p>
+          <a:p>
+            <a:pPr lvl="0" indent="0" marL="0">
+              <a:buNone/>
+            </a:pPr>
+            <a:r>
+              <a:rPr/>
+              <a:t>10 min: Section 4 scope (in/out table)</a:t>
             </a:r>
           </a:p>
           <a:p>
@@ -5357,7 +5357,7 @@
             </a:pPr>
             <a:r>
               <a:rPr/>
-              <a:t>Block 3 — PRD-Light §§5–7</a:t>
+              <a:t>Block 3 — PRD-Light Sections 5–7</a:t>
             </a:r>
           </a:p>
         </p:txBody>
@@ -5693,7 +5693,7 @@
             </a:pPr>
             <a:r>
               <a:rPr/>
-              <a:t>👥 Activity 3 — PRD-Light §§5–7</a:t>
+              <a:t>👥 Activity 3 — PRD-Light Sections 5–7</a:t>
             </a:r>
           </a:p>
         </p:txBody>
@@ -5730,25 +5730,25 @@
             </a:pPr>
             <a:r>
               <a:rPr/>
-              <a:t>10 min: §5 solution sketch (no implementation)</a:t>
-            </a:r>
-          </a:p>
-          <a:p>
-            <a:pPr lvl="0" indent="0" marL="0">
-              <a:buNone/>
-            </a:pPr>
-            <a:r>
-              <a:rPr/>
-              <a:t>15 min: §6 ACs (3 happy / 2 sad / 1 weird)</a:t>
-            </a:r>
-          </a:p>
-          <a:p>
-            <a:pPr lvl="0" indent="0" marL="0">
-              <a:buNone/>
-            </a:pPr>
-            <a:r>
-              <a:rPr/>
-              <a:t>15 min: §7 NFRs (5 categories, one each)</a:t>
+              <a:t>10 min: Section 5 solution sketch (no implementation)</a:t>
+            </a:r>
+          </a:p>
+          <a:p>
+            <a:pPr lvl="0" indent="0" marL="0">
+              <a:buNone/>
+            </a:pPr>
+            <a:r>
+              <a:rPr/>
+              <a:t>15 min: Section 6 ACs (3 happy / 2 sad / 1 weird)</a:t>
+            </a:r>
+          </a:p>
+          <a:p>
+            <a:pPr lvl="0" indent="0" marL="0">
+              <a:buNone/>
+            </a:pPr>
+            <a:r>
+              <a:rPr/>
+              <a:t>15 min: Section 7 NFRs (5 categories, one each)</a:t>
             </a:r>
           </a:p>
           <a:p>
@@ -5879,7 +5879,7 @@
             </a:pPr>
             <a:r>
               <a:rPr/>
-              <a:t>🧿 PRD-Light Validation Prompt</a:t>
+              <a:t>🤖 PRD-Light Validation Prompt</a:t>
             </a:r>
           </a:p>
         </p:txBody>
@@ -6254,7 +6254,7 @@
             </a:pPr>
             <a:r>
               <a:rPr/>
-              <a:t>PRD-light §§1–7 (2 pages)</a:t>
+              <a:t>PRD-light Sections 1–7 (2 pages)</a:t>
             </a:r>
           </a:p>
           <a:p>
@@ -6482,7 +6482,7 @@
             </a:pPr>
             <a:r>
               <a:rPr/>
-              <a:t>Draft PRD-light §§1–7 — 2 pages, full discipline</a:t>
+              <a:t>Draft PRD-light Sections 1–7 — 2 pages, full discipline</a:t>
             </a:r>
           </a:p>
           <a:p>
@@ -6671,7 +6671,7 @@
             </a:pPr>
             <a:r>
               <a:rPr/>
-              <a:t>PRD-light §§1–4</a:t>
+              <a:t>PRD-light Sections 1–4</a:t>
             </a:r>
           </a:p>
           <a:p>
@@ -6698,7 +6698,7 @@
             </a:pPr>
             <a:r>
               <a:rPr/>
-              <a:t>PRD-light §§5–7</a:t>
+              <a:t>PRD-light Sections 5–7</a:t>
             </a:r>
           </a:p>
           <a:p>
@@ -6881,61 +6881,61 @@
             </a:pPr>
             <a:r>
               <a:rPr/>
-              <a:t>§1 Context (½ page)</a:t>
-            </a:r>
-          </a:p>
-          <a:p>
-            <a:pPr lvl="0" indent="0" marL="0">
-              <a:buNone/>
-            </a:pPr>
-            <a:r>
-              <a:rPr/>
-              <a:t>§2 Problem (½ page)</a:t>
-            </a:r>
-          </a:p>
-          <a:p>
-            <a:pPr lvl="0" indent="0" marL="0">
-              <a:buNone/>
-            </a:pPr>
-            <a:r>
-              <a:rPr/>
-              <a:t>§3 Goals + non-goals (½ page)</a:t>
-            </a:r>
-          </a:p>
-          <a:p>
-            <a:pPr lvl="0" indent="0" marL="0">
-              <a:buNone/>
-            </a:pPr>
-            <a:r>
-              <a:rPr/>
-              <a:t>§4 Scope (in/out table)</a:t>
-            </a:r>
-          </a:p>
-          <a:p>
-            <a:pPr lvl="0" indent="0" marL="0">
-              <a:buNone/>
-            </a:pPr>
-            <a:r>
-              <a:rPr/>
-              <a:t>§5 Solution sketch (½ page)</a:t>
-            </a:r>
-          </a:p>
-          <a:p>
-            <a:pPr lvl="0" indent="0" marL="0">
-              <a:buNone/>
-            </a:pPr>
-            <a:r>
-              <a:rPr/>
-              <a:t>§6 Top 6–8 ACs</a:t>
-            </a:r>
-          </a:p>
-          <a:p>
-            <a:pPr lvl="0" indent="0" marL="0">
-              <a:buNone/>
-            </a:pPr>
-            <a:r>
-              <a:rPr/>
-              <a:t>§7 Top 5 NFRs (one per category)</a:t>
+              <a:t>Section 1 Context (½ page)</a:t>
+            </a:r>
+          </a:p>
+          <a:p>
+            <a:pPr lvl="0" indent="0" marL="0">
+              <a:buNone/>
+            </a:pPr>
+            <a:r>
+              <a:rPr/>
+              <a:t>Section 2 Problem (½ page)</a:t>
+            </a:r>
+          </a:p>
+          <a:p>
+            <a:pPr lvl="0" indent="0" marL="0">
+              <a:buNone/>
+            </a:pPr>
+            <a:r>
+              <a:rPr/>
+              <a:t>Section 3 Goals + non-goals (½ page)</a:t>
+            </a:r>
+          </a:p>
+          <a:p>
+            <a:pPr lvl="0" indent="0" marL="0">
+              <a:buNone/>
+            </a:pPr>
+            <a:r>
+              <a:rPr/>
+              <a:t>Section 4 Scope (in/out table)</a:t>
+            </a:r>
+          </a:p>
+          <a:p>
+            <a:pPr lvl="0" indent="0" marL="0">
+              <a:buNone/>
+            </a:pPr>
+            <a:r>
+              <a:rPr/>
+              <a:t>Section 5 Solution sketch (½ page)</a:t>
+            </a:r>
+          </a:p>
+          <a:p>
+            <a:pPr lvl="0" indent="0" marL="0">
+              <a:buNone/>
+            </a:pPr>
+            <a:r>
+              <a:rPr/>
+              <a:t>Section 6 Top 6–8 ACs</a:t>
+            </a:r>
+          </a:p>
+          <a:p>
+            <a:pPr lvl="0" indent="0" marL="0">
+              <a:buNone/>
+            </a:pPr>
+            <a:r>
+              <a:rPr/>
+              <a:t>Section 7 Top 5 NFRs (one per category)</a:t>
             </a:r>
           </a:p>
           <a:p>
@@ -7183,7 +7183,7 @@
             </a:pPr>
             <a:r>
               <a:rPr/>
-              <a:t>Block 2 — PRD-Light §§1–4</a:t>
+              <a:t>Block 2 — PRD-Light Sections 1–4</a:t>
             </a:r>
           </a:p>
         </p:txBody>

--- a/week-08/presentations/ppts/day-02-capstone-discovery-prd.pptx
+++ b/week-08/presentations/ppts/day-02-capstone-discovery-prd.pptx
@@ -5619,7 +5619,7 @@
             </a:pPr>
             <a:r>
               <a:rPr/>
-              <a:t>1 Accessibility NFR (WCAG floor)</a:t>
+              <a:t>1 Accessibility NFR (Web Content Accessibility Guidelines, WCAG floor)</a:t>
             </a:r>
           </a:p>
           <a:p>
@@ -6299,7 +6299,7 @@
             </a:pPr>
             <a:r>
               <a:rPr/>
-              <a:t>TCD-light + TMD-light</a:t>
+              <a:t>Technical Concept Document (TCD-light) + Technical Modeling Document (TMD-light)</a:t>
             </a:r>
           </a:p>
           <a:p>
@@ -6473,16 +6473,16 @@
             </a:pPr>
             <a:r>
               <a:rPr/>
-              <a:t>Name the persona / JTBD / pain points for the capstone subject</a:t>
-            </a:r>
-          </a:p>
-          <a:p>
-            <a:pPr lvl="0" indent="0" marL="0">
-              <a:buNone/>
-            </a:pPr>
-            <a:r>
-              <a:rPr/>
-              <a:t>Draft PRD-light Sections 1–7 — 2 pages, full discipline</a:t>
+              <a:t>Name the persona / Jobs To Be Done (JTBD) / pain points for the capstone subject</a:t>
+            </a:r>
+          </a:p>
+          <a:p>
+            <a:pPr lvl="0" indent="0" marL="0">
+              <a:buNone/>
+            </a:pPr>
+            <a:r>
+              <a:rPr/>
+              <a:t>Draft the compressed Product Requirements Document (PRD-light) Sections 1–7 — 2 pages, full discipline</a:t>
             </a:r>
           </a:p>
           <a:p>
@@ -6926,16 +6926,16 @@
             </a:pPr>
             <a:r>
               <a:rPr/>
-              <a:t>Section 6 Top 6–8 ACs</a:t>
-            </a:r>
-          </a:p>
-          <a:p>
-            <a:pPr lvl="0" indent="0" marL="0">
-              <a:buNone/>
-            </a:pPr>
-            <a:r>
-              <a:rPr/>
-              <a:t>Section 7 Top 5 NFRs (one per category)</a:t>
+              <a:t>Section 6 Top 6–8 acceptance criteria (ACs)</a:t>
+            </a:r>
+          </a:p>
+          <a:p>
+            <a:pPr lvl="0" indent="0" marL="0">
+              <a:buNone/>
+            </a:pPr>
+            <a:r>
+              <a:rPr/>
+              <a:t>Section 7 Top 5 non-functional requirements (NFRs), one per category</a:t>
             </a:r>
           </a:p>
           <a:p>

--- a/week-08/presentations/ppts/day-02-capstone-discovery-prd.pptx
+++ b/week-08/presentations/ppts/day-02-capstone-discovery-prd.pptx
@@ -6473,7 +6473,7 @@
             </a:pPr>
             <a:r>
               <a:rPr/>
-              <a:t>Name the persona / Jobs To Be Done (JTBD) / pain points for the capstone subject</a:t>
+              <a:t>Name the persona / Jobs To Be Done (JTBD) / pain points for Holocron</a:t>
             </a:r>
           </a:p>
           <a:p>

--- a/week-08/presentations/ppts/day-02-capstone-discovery-prd.pptx
+++ b/week-08/presentations/ppts/day-02-capstone-discovery-prd.pptx
@@ -5202,6 +5202,25 @@
               <a:t>Triad members solo-draft first. Pick the strongest. Then apply AI to tighten.</a:t>
             </a:r>
           </a:p>
+          <a:p>
+            <a:pPr lvl="0" indent="0">
+              <a:buNone/>
+            </a:pPr>
+            <a:r>
+              <a:rPr>
+                <a:latin typeface="Courier"/>
+              </a:rPr>
+              <a:t>Role: Editor for a TPM's PRD context section.
+Context: &lt;triad's draft Section 1 + discovery summary&gt;
+Task: Tighten this section to ½ page max. Preserve the
+customer quote. Preserve the strategic anchor. Cut anything
+that sounds like marketing language.
+Constraints:
+- Do not invent customer signal
+- Flag any claim that needs source backing
+Format: Tightened Section 1 + a "what I cut" note.</a:t>
+            </a:r>
+          </a:p>
         </p:txBody>
       </p:sp>
     </p:spTree>
@@ -5884,6 +5903,44 @@
           </a:p>
         </p:txBody>
       </p:sp>
+      <p:sp>
+        <p:nvSpPr>
+          <p:cNvPr id="3" name="Content Placeholder 2"/>
+          <p:cNvSpPr>
+            <a:spLocks noGrp="1"/>
+          </p:cNvSpPr>
+          <p:nvPr>
+            <p:ph idx="1"/>
+          </p:nvPr>
+        </p:nvSpPr>
+        <p:spPr/>
+        <p:txBody>
+          <a:bodyPr/>
+          <a:lstStyle/>
+          <a:p>
+            <a:pPr lvl="0" indent="0">
+              <a:buNone/>
+            </a:pPr>
+            <a:r>
+              <a:rPr>
+                <a:latin typeface="Courier"/>
+              </a:rPr>
+              <a:t>Role: Senior PM reviewing a compressed PRD.
+Context: &lt;paste PRD-light Sections 1–7&gt;
+Task: Identify 5 issues:
+1. A claim that lacks evidence
+2. A goal that's actually an output
+3. A non-goal that's missing
+4. An AC that's untestable or vague
+5. An NFR that's boilerplate
+Constraints:
+- Be specific
+- Suggest a concrete fix
+Format: 5 numbered findings.</a:t>
+            </a:r>
+          </a:p>
+        </p:txBody>
+      </p:sp>
     </p:spTree>
   </p:cSld>
 </p:sld>
@@ -7010,6 +7067,20 @@
         <p:txBody>
           <a:bodyPr/>
           <a:lstStyle/>
+          <a:p>
+            <a:pPr lvl="0" indent="0">
+              <a:buNone/>
+            </a:pPr>
+            <a:r>
+              <a:rPr>
+                <a:latin typeface="Courier"/>
+              </a:rPr>
+              <a:t>**Persona:** &lt;role + segment&gt;
+**Job-to-be-done:** &lt;verb-based, in their language&gt;
+**Why it's hard today:** &lt;specific friction; quote a real customer
+if possible&gt;</a:t>
+            </a:r>
+          </a:p>
           <a:p>
             <a:pPr lvl="0" indent="0" marL="0">
               <a:buNone/>

--- a/week-08/presentations/ppts/day-02-capstone-discovery-prd.pptx
+++ b/week-08/presentations/ppts/day-02-capstone-discovery-prd.pptx
@@ -790,7 +790,7 @@
             </a:pPr>
             <a:r>
               <a:rPr/>
-              <a:t>If a triad ships only happy paths, push back hard. The discipline matters.</a:t>
+              <a:t>If a quad ships only happy paths, push back hard. The discipline matters.</a:t>
             </a:r>
           </a:p>
         </p:txBody>
@@ -1200,7 +1200,7 @@
             </a:pPr>
             <a:r>
               <a:rPr/>
-              <a:t>Triads who skip Day-3 planning lose tomorrow morning to start-up cost.</a:t>
+              <a:t>Quads who skip Day-3 planning lose tomorrow morning to start-up cost.</a:t>
             </a:r>
           </a:p>
         </p:txBody>
@@ -1446,7 +1446,7 @@
             </a:pPr>
             <a:r>
               <a:rPr/>
-              <a:t>By 16:00, every triad has 2-page PRD-light + Day-3 plan.</a:t>
+              <a:t>By 16:00, every quad has 2-page PRD-light + Day-3 plan.</a:t>
             </a:r>
           </a:p>
         </p:txBody>
@@ -5199,7 +5199,7 @@
             </a:pPr>
             <a:r>
               <a:rPr/>
-              <a:t>Triad members solo-draft first. Pick the strongest. Then apply AI to tighten.</a:t>
+              <a:t>Quad members solo-draft first. Pick the strongest. Then apply AI to tighten.</a:t>
             </a:r>
           </a:p>
           <a:p>
@@ -5211,7 +5211,7 @@
                 <a:latin typeface="Courier"/>
               </a:rPr>
               <a:t>Role: Editor for a TPM's PRD context section.
-Context: &lt;triad's draft Section 1 + discovery summary&gt;
+Context: &lt;quad's draft Section 1 + discovery summary&gt;
 Task: Tighten this section to ½ page max. Preserve the
 customer quote. Preserve the strategic anchor. Cut anything
 that sounds like marketing language.
@@ -5293,16 +5293,16 @@
             </a:pPr>
             <a:r>
               <a:rPr b="1"/>
-              <a:t>Triads • 40 minutes</a:t>
-            </a:r>
-          </a:p>
-          <a:p>
-            <a:pPr lvl="0" indent="0" marL="0">
-              <a:buNone/>
-            </a:pPr>
-            <a:r>
-              <a:rPr/>
-              <a:t>15 min: Section 1 + Section 2 (solo drafts → triad picks → AI tightens)</a:t>
+              <a:t>Quads • 40 minutes</a:t>
+            </a:r>
+          </a:p>
+          <a:p>
+            <a:pPr lvl="0" indent="0" marL="0">
+              <a:buNone/>
+            </a:pPr>
+            <a:r>
+              <a:rPr/>
+              <a:t>15 min: Section 1 + Section 2 (solo drafts → quad picks → AI tightens)</a:t>
             </a:r>
           </a:p>
           <a:p>
@@ -5740,7 +5740,7 @@
             </a:pPr>
             <a:r>
               <a:rPr b="1"/>
-              <a:t>Triads • 40 minutes</a:t>
+              <a:t>Quads • 40 minutes</a:t>
             </a:r>
           </a:p>
           <a:p>
@@ -6110,7 +6110,7 @@
             </a:pPr>
             <a:r>
               <a:rPr b="1"/>
-              <a:t>Triads • 45 minutes • Wrap</a:t>
+              <a:t>Quads • 45 minutes • Wrap</a:t>
             </a:r>
           </a:p>
           <a:p>
@@ -7162,7 +7162,7 @@
             </a:pPr>
             <a:r>
               <a:rPr b="1"/>
-              <a:t>Triads • 35 minutes</a:t>
+              <a:t>Quads • 35 minutes</a:t>
             </a:r>
           </a:p>
           <a:p>

--- a/week-08/presentations/ppts/day-02-capstone-discovery-prd.pptx
+++ b/week-08/presentations/ppts/day-02-capstone-discovery-prd.pptx
@@ -5293,7 +5293,7 @@
             </a:pPr>
             <a:r>
               <a:rPr b="1"/>
-              <a:t>Quads • 40 minutes</a:t>
+              <a:t>Quads • 50 minutes</a:t>
             </a:r>
           </a:p>
           <a:p>
@@ -5740,7 +5740,7 @@
             </a:pPr>
             <a:r>
               <a:rPr b="1"/>
-              <a:t>Quads • 40 minutes</a:t>
+              <a:t>Quads • 50 minutes</a:t>
             </a:r>
           </a:p>
           <a:p>
@@ -6110,7 +6110,7 @@
             </a:pPr>
             <a:r>
               <a:rPr b="1"/>
-              <a:t>Quads • 45 minutes • Wrap</a:t>
+              <a:t>Quads • 55 minutes • Wrap</a:t>
             </a:r>
           </a:p>
           <a:p>
@@ -6857,7 +6857,7 @@
             </a:pPr>
             <a:r>
               <a:rPr b="1"/>
-              <a:t>Week-1 muscles in 35 minutes</a:t>
+              <a:t>Week-1 muscles in 45 minutes</a:t>
             </a:r>
           </a:p>
         </p:txBody>
@@ -7162,7 +7162,7 @@
             </a:pPr>
             <a:r>
               <a:rPr b="1"/>
-              <a:t>Quads • 35 minutes</a:t>
+              <a:t>Quads • 45 minutes</a:t>
             </a:r>
           </a:p>
           <a:p>

--- a/week-08/presentations/ppts/day-02-capstone-discovery-prd.pptx
+++ b/week-08/presentations/ppts/day-02-capstone-discovery-prd.pptx
@@ -5302,7 +5302,7 @@
             </a:pPr>
             <a:r>
               <a:rPr/>
-              <a:t>15 min: Section 1 + Section 2 (solo drafts → quad picks → AI tightens)</a:t>
+              <a:t>25 min: Section 1 + Section 2 (solo drafts → quad picks → AI tightens)</a:t>
             </a:r>
           </a:p>
           <a:p>
@@ -5329,7 +5329,7 @@
             </a:pPr>
             <a:r>
               <a:rPr/>
-              <a:t>⏱ 15 + 15 + 10</a:t>
+              <a:t>⏱ 25 + 15 + 10</a:t>
             </a:r>
           </a:p>
         </p:txBody>
@@ -5758,7 +5758,7 @@
             </a:pPr>
             <a:r>
               <a:rPr/>
-              <a:t>15 min: Section 6 ACs (3 happy / 2 sad / 1 weird)</a:t>
+              <a:t>25 min: Section 6 ACs (3 happy / 2 sad / 1 weird)</a:t>
             </a:r>
           </a:p>
           <a:p>
@@ -5776,7 +5776,7 @@
             </a:pPr>
             <a:r>
               <a:rPr/>
-              <a:t>⏱ 10 + 15 + 15</a:t>
+              <a:t>⏱ 10 + 25 + 15</a:t>
             </a:r>
           </a:p>
         </p:txBody>
@@ -6137,16 +6137,16 @@
             </a:pPr>
             <a:r>
               <a:rPr/>
-              <a:t>20 min: Day-3 plan (3 architecture questions, integration sketch, critical path)</a:t>
-            </a:r>
-          </a:p>
-          <a:p>
-            <a:pPr lvl="0" indent="0" marL="0">
-              <a:buNone/>
-            </a:pPr>
-            <a:r>
-              <a:rPr/>
-              <a:t>⏱ 15 + 10 + 20 · 15-min wrap</a:t>
+              <a:t>30 min: Day-3 plan (3 architecture questions, integration sketch, critical path)</a:t>
+            </a:r>
+          </a:p>
+          <a:p>
+            <a:pPr lvl="0" indent="0" marL="0">
+              <a:buNone/>
+            </a:pPr>
+            <a:r>
+              <a:rPr/>
+              <a:t>⏱ 15 + 10 + 30 · 15-min wrap</a:t>
             </a:r>
           </a:p>
         </p:txBody>
@@ -7171,7 +7171,7 @@
             </a:pPr>
             <a:r>
               <a:rPr/>
-              <a:t>10 min: synthesize gathered inputs</a:t>
+              <a:t>20 min: synthesize gathered inputs</a:t>
             </a:r>
           </a:p>
           <a:p>
@@ -7207,7 +7207,7 @@
             </a:pPr>
             <a:r>
               <a:rPr/>
-              <a:t>⏱ 10 + 10 + 10 + 5</a:t>
+              <a:t>⏱ 20 + 10 + 10 + 5</a:t>
             </a:r>
           </a:p>
         </p:txBody>

--- a/week-08/presentations/ppts/day-02-capstone-discovery-prd.pptx
+++ b/week-08/presentations/ppts/day-02-capstone-discovery-prd.pptx
@@ -5,7 +5,7 @@
     <p:sldMasterId id="2147483648" r:id="rId1"/>
   </p:sldMasterIdLst>
   <p:notesMasterIdLst>
-    <p:notesMasterId r:id="rId23"/>
+    <p:notesMasterId r:id="rId24"/>
   </p:notesMasterIdLst>
   <p:sldIdLst>
     <p:sldId id="256" r:id="rId2"/>
@@ -29,6 +29,7 @@
     <p:sldId id="274" r:id="rId20"/>
     <p:sldId id="275" r:id="rId21"/>
     <p:sldId id="276" r:id="rId22"/>
+    <p:sldId id="277" r:id="rId23"/>
   </p:sldIdLst>
   <p:sldSz cx="9144000" cy="5143500" type="screen16x9"/>
   <p:notesSz cx="6858000" cy="9144000"/>
@@ -626,7 +627,7 @@
             </a:pPr>
             <a:r>
               <a:rPr/>
-              <a:t>Goals are outcomes, not features. Same Wk-3 discipline.</a:t>
+              <a:t>“What I cut” note is informative — what was AI willing to throw away?</a:t>
             </a:r>
           </a:p>
         </p:txBody>
@@ -708,7 +709,7 @@
             </a:pPr>
             <a:r>
               <a:rPr/>
-              <a:t>Frame the block: solution sketch, ac, nfrs. Set context briefly, then move into the teaching content.</a:t>
+              <a:t>Goals are outcomes, not features. Same Wk-3 discipline.</a:t>
             </a:r>
           </a:p>
         </p:txBody>
@@ -790,7 +791,7 @@
             </a:pPr>
             <a:r>
               <a:rPr/>
-              <a:t>If a quad ships only happy paths, push back hard. The discipline matters.</a:t>
+              <a:t>Frame the block: solution sketch, ac, nfrs. Set context briefly, then move into the teaching content.</a:t>
             </a:r>
           </a:p>
         </p:txBody>
@@ -872,7 +873,7 @@
             </a:pPr>
             <a:r>
               <a:rPr/>
-              <a:t>Force defenses. Boilerplate NFRs are caught even in compressed form.</a:t>
+              <a:t>If a quad ships only happy paths, push back hard. The discipline matters.</a:t>
             </a:r>
           </a:p>
         </p:txBody>
@@ -954,7 +955,7 @@
             </a:pPr>
             <a:r>
               <a:rPr/>
-              <a:t>“Engineer’s first 3 questions” test for Section 5 still applies.</a:t>
+              <a:t>Force defenses. Boilerplate NFRs are caught even in compressed form.</a:t>
             </a:r>
           </a:p>
         </p:txBody>
@@ -1036,7 +1037,7 @@
             </a:pPr>
             <a:r>
               <a:rPr/>
-              <a:t>Frame the block: catch the issues; set up tomorrow’s architecture. Set context briefly, then move into the teaching content.</a:t>
+              <a:t>“Engineer’s first 3 questions” test for Section 5 still applies.</a:t>
             </a:r>
           </a:p>
         </p:txBody>
@@ -1118,7 +1119,7 @@
             </a:pPr>
             <a:r>
               <a:rPr/>
-              <a:t>Add to Pattern Library. Reusable for future compressed PRDs.</a:t>
+              <a:t>Frame the block: catch the issues; set up tomorrow’s architecture. Set context briefly, then move into the teaching content.</a:t>
             </a:r>
           </a:p>
         </p:txBody>
@@ -1200,7 +1201,7 @@
             </a:pPr>
             <a:r>
               <a:rPr/>
-              <a:t>Quads who skip Day-3 planning lose tomorrow morning to start-up cost.</a:t>
+              <a:t>Add to Pattern Library. Reusable for future compressed PRDs.</a:t>
             </a:r>
           </a:p>
         </p:txBody>
@@ -1282,7 +1283,7 @@
             </a:pPr>
             <a:r>
               <a:rPr/>
-              <a:t>Wrap-share: persona JTBD, AC proudest, NFR worried about.</a:t>
+              <a:t>Quads who skip Day-3 planning lose tomorrow morning to start-up cost.</a:t>
             </a:r>
           </a:p>
         </p:txBody>
@@ -1364,7 +1365,7 @@
             </a:pPr>
             <a:r>
               <a:rPr/>
-              <a:t>Round-robin close: each person says one thing they’re nervous about for the capstone.</a:t>
+              <a:t>Wrap-share: persona JTBD, AC proudest, NFR worried about.</a:t>
             </a:r>
           </a:p>
         </p:txBody>
@@ -1528,6 +1529,88 @@
             </a:pPr>
             <a:r>
               <a:rPr/>
+              <a:t>Round-robin close: each person says one thing they’re nervous about for the capstone.</a:t>
+            </a:r>
+          </a:p>
+        </p:txBody>
+      </p:sp>
+      <p:sp>
+        <p:nvSpPr>
+          <p:cNvPr id="4" name="Slide Number Placeholder 3"/>
+          <p:cNvSpPr>
+            <a:spLocks noGrp="1"/>
+          </p:cNvSpPr>
+          <p:nvPr>
+            <p:ph type="sldNum" sz="quarter" idx="10"/>
+          </p:nvPr>
+        </p:nvSpPr>
+        <p:spPr/>
+        <p:txBody>
+          <a:bodyPr/>
+          <a:lstStyle/>
+          <a:p>
+            <a:fld id="{18BDFEC3-8487-43E8-A154-7C12CBC1FFF2}" type="slidenum">
+              <a:rPr lang="en-US"/>
+              <a:t>21</a:t>
+            </a:fld>
+            <a:endParaRPr lang="en-US"/>
+          </a:p>
+        </p:txBody>
+      </p:sp>
+    </p:spTree>
+  </p:cSld>
+</p:notes>
+</file>
+
+<file path=ppt/notesSlides/notesSlide21.xml><?xml version="1.0" encoding="utf-8"?>
+<p:notes xmlns:a="http://schemas.openxmlformats.org/drawingml/2006/main" xmlns:r="http://schemas.openxmlformats.org/officeDocument/2006/relationships" xmlns:p="http://schemas.openxmlformats.org/presentationml/2006/main">
+  <p:cSld>
+    <p:spTree>
+      <p:nvGrpSpPr>
+        <p:cNvPr id="1" name=""/>
+        <p:cNvGrpSpPr/>
+        <p:nvPr/>
+      </p:nvGrpSpPr>
+      <p:grpSpPr>
+        <a:xfrm>
+          <a:off x="0" y="0"/>
+          <a:ext cx="0" cy="0"/>
+          <a:chOff x="0" y="0"/>
+          <a:chExt cx="0" cy="0"/>
+        </a:xfrm>
+      </p:grpSpPr>
+      <p:sp>
+        <p:nvSpPr>
+          <p:cNvPr id="2" name="Slide Image Placeholder 1"/>
+          <p:cNvSpPr>
+            <a:spLocks noGrp="1" noRot="1" noChangeAspect="1"/>
+          </p:cNvSpPr>
+          <p:nvPr>
+            <p:ph type="sldImg"/>
+          </p:nvPr>
+        </p:nvSpPr>
+        <p:spPr/>
+      </p:sp>
+      <p:sp>
+        <p:nvSpPr>
+          <p:cNvPr id="3" name="Notes Placeholder 2"/>
+          <p:cNvSpPr>
+            <a:spLocks noGrp="1"/>
+          </p:cNvSpPr>
+          <p:nvPr>
+            <p:ph type="body" idx="1"/>
+          </p:nvPr>
+        </p:nvSpPr>
+        <p:spPr/>
+        <p:txBody>
+          <a:bodyPr/>
+          <a:lstStyle/>
+          <a:p>
+            <a:pPr lvl="0" indent="0" marL="0">
+              <a:buNone/>
+            </a:pPr>
+            <a:r>
+              <a:rPr/>
               <a:t>Open the floor. Use the prompt — “What was hardest about compressing your PRD work today?” — to invite one short reflection per voice. Keep it tight; this is closure, not new content.</a:t>
             </a:r>
           </a:p>
@@ -1550,7 +1633,7 @@
           <a:p>
             <a:fld id="{18BDFEC3-8487-43E8-A154-7C12CBC1FFF2}" type="slidenum">
               <a:rPr lang="en-US"/>
-              <a:t>21</a:t>
+              <a:t>22</a:t>
             </a:fld>
             <a:endParaRPr lang="en-US"/>
           </a:p>
@@ -1856,7 +1939,7 @@
             </a:pPr>
             <a:r>
               <a:rPr/>
-              <a:t>Three fields. The customer quote is the load-bearing element.</a:t>
+              <a:t>Signal first, then persona, then pain. The Discovery Signal Pack is the starting set; teams extend it with the real Holocron stakeholders (Content Owner, Engineer, Legal/Compliance, Architecture). The “do not invent” rule is the discipline that separates a grounded PRD from a fictional one.</a:t>
             </a:r>
           </a:p>
         </p:txBody>
@@ -1938,7 +2021,7 @@
             </a:pPr>
             <a:r>
               <a:rPr/>
-              <a:t>Force the customer quote. If no real quote, mark as “to validate.”</a:t>
+              <a:t>Three fields. The customer quote is the load-bearing element.</a:t>
             </a:r>
           </a:p>
         </p:txBody>
@@ -2020,7 +2103,7 @@
             </a:pPr>
             <a:r>
               <a:rPr/>
-              <a:t>Frame the block: context, problem, goals/non-goals, scope. Set context briefly, then move into the teaching content.</a:t>
+              <a:t>Force the customer quote. If no real quote, mark as “to validate.”</a:t>
             </a:r>
           </a:p>
         </p:txBody>
@@ -2102,7 +2185,7 @@
             </a:pPr>
             <a:r>
               <a:rPr/>
-              <a:t>“What I cut” note is informative — what was AI willing to throw away?</a:t>
+              <a:t>Frame the block: context, problem, goals/non-goals, scope. Set context briefly, then move into the teaching content.</a:t>
             </a:r>
           </a:p>
         </p:txBody>
@@ -5174,7 +5257,7 @@
             </a:pPr>
             <a:r>
               <a:rPr/>
-              <a:t>🤖 AI Assistance Pattern</a:t>
+              <a:t>Block 2 — PRD-Light Sections 1–4</a:t>
             </a:r>
           </a:p>
         </p:txBody>
@@ -5195,30 +5278,14 @@
           <a:lstStyle/>
           <a:p>
             <a:pPr lvl="0" indent="0" marL="0">
-              <a:buNone/>
-            </a:pPr>
-            <a:r>
-              <a:rPr/>
-              <a:t>Quad members solo-draft first. Pick the strongest. Then apply AI to tighten.</a:t>
-            </a:r>
-          </a:p>
-          <a:p>
-            <a:pPr lvl="0" indent="0">
-              <a:buNone/>
-            </a:pPr>
-            <a:r>
-              <a:rPr>
-                <a:latin typeface="Courier"/>
-              </a:rPr>
-              <a:t>Role: Editor for a TPM's PRD context section.
-Context: &lt;quad's draft Section 1 + discovery summary&gt;
-Task: Tighten this section to ½ page max. Preserve the
-customer quote. Preserve the strategic anchor. Cut anything
-that sounds like marketing language.
-Constraints:
-- Do not invent customer signal
-- Flag any claim that needs source backing
-Format: Tightened Section 1 + a "what I cut" note.</a:t>
+              <a:spcBef>
+                <a:spcPts val="3000"/>
+              </a:spcBef>
+              <a:buNone/>
+            </a:pPr>
+            <a:r>
+              <a:rPr b="1"/>
+              <a:t>Context, Problem, Goals/Non-goals, Scope</a:t>
             </a:r>
           </a:p>
         </p:txBody>
@@ -5265,7 +5332,7 @@
             </a:pPr>
             <a:r>
               <a:rPr/>
-              <a:t>👥 Activity 2 — PRD-Light Sections 1–4</a:t>
+              <a:t>🤖 AI Assistance Pattern</a:t>
             </a:r>
           </a:p>
         </p:txBody>
@@ -5286,50 +5353,30 @@
           <a:lstStyle/>
           <a:p>
             <a:pPr lvl="0" indent="0" marL="0">
-              <a:spcBef>
-                <a:spcPts val="3000"/>
-              </a:spcBef>
-              <a:buNone/>
-            </a:pPr>
-            <a:r>
-              <a:rPr b="1"/>
-              <a:t>Quads • 50 minutes</a:t>
-            </a:r>
-          </a:p>
-          <a:p>
-            <a:pPr lvl="0" indent="0" marL="0">
-              <a:buNone/>
-            </a:pPr>
-            <a:r>
-              <a:rPr/>
-              <a:t>25 min: Section 1 + Section 2 (solo drafts → quad picks → AI tightens)</a:t>
-            </a:r>
-          </a:p>
-          <a:p>
-            <a:pPr lvl="0" indent="0" marL="0">
-              <a:buNone/>
-            </a:pPr>
-            <a:r>
-              <a:rPr/>
-              <a:t>15 min: Section 3 goals + non-goals</a:t>
-            </a:r>
-          </a:p>
-          <a:p>
-            <a:pPr lvl="0" indent="0" marL="0">
-              <a:buNone/>
-            </a:pPr>
-            <a:r>
-              <a:rPr/>
-              <a:t>10 min: Section 4 scope (in/out table)</a:t>
-            </a:r>
-          </a:p>
-          <a:p>
-            <a:pPr lvl="0" indent="0" marL="0">
-              <a:buNone/>
-            </a:pPr>
-            <a:r>
-              <a:rPr/>
-              <a:t>⏱ 25 + 15 + 10</a:t>
+              <a:buNone/>
+            </a:pPr>
+            <a:r>
+              <a:rPr/>
+              <a:t>Quad members solo-draft first. Pick the strongest. Then apply AI to tighten.</a:t>
+            </a:r>
+          </a:p>
+          <a:p>
+            <a:pPr lvl="0" indent="0">
+              <a:buNone/>
+            </a:pPr>
+            <a:r>
+              <a:rPr>
+                <a:latin typeface="Courier"/>
+              </a:rPr>
+              <a:t>Role: Editor for a TPM's PRD context section.
+Context: &lt;quad's draft Section 1 + discovery summary&gt;
+Task: Tighten this section to ½ page max. Preserve the
+customer quote. Preserve the strategic anchor. Cut anything
+that sounds like marketing language.
+Constraints:
+- Do not invent customer signal
+- Flag any claim that needs source backing
+Format: Tightened Section 1 + a "what I cut" note.</a:t>
             </a:r>
           </a:p>
         </p:txBody>
@@ -5376,7 +5423,7 @@
             </a:pPr>
             <a:r>
               <a:rPr/>
-              <a:t>Block 3 — PRD-Light Sections 5–7</a:t>
+              <a:t>👥 Activity 2 — PRD-Light Sections 1–4</a:t>
             </a:r>
           </a:p>
         </p:txBody>
@@ -5404,7 +5451,43 @@
             </a:pPr>
             <a:r>
               <a:rPr b="1"/>
-              <a:t>Solution sketch, AC, NFRs</a:t>
+              <a:t>Quads • 50 minutes</a:t>
+            </a:r>
+          </a:p>
+          <a:p>
+            <a:pPr lvl="0" indent="0" marL="0">
+              <a:buNone/>
+            </a:pPr>
+            <a:r>
+              <a:rPr/>
+              <a:t>25 min: Section 1 + Section 2 (solo drafts → quad picks → AI tightens)</a:t>
+            </a:r>
+          </a:p>
+          <a:p>
+            <a:pPr lvl="0" indent="0" marL="0">
+              <a:buNone/>
+            </a:pPr>
+            <a:r>
+              <a:rPr/>
+              <a:t>15 min: Section 3 goals + non-goals</a:t>
+            </a:r>
+          </a:p>
+          <a:p>
+            <a:pPr lvl="0" indent="0" marL="0">
+              <a:buNone/>
+            </a:pPr>
+            <a:r>
+              <a:rPr/>
+              <a:t>10 min: Section 4 scope (in/out table)</a:t>
+            </a:r>
+          </a:p>
+          <a:p>
+            <a:pPr lvl="0" indent="0" marL="0">
+              <a:buNone/>
+            </a:pPr>
+            <a:r>
+              <a:rPr/>
+              <a:t>⏱ 25 + 15 + 10</a:t>
             </a:r>
           </a:p>
         </p:txBody>
@@ -5451,7 +5534,7 @@
             </a:pPr>
             <a:r>
               <a:rPr/>
-              <a:t>✅ AC Coverage (Compressed)</a:t>
+              <a:t>Block 3 — PRD-Light Sections 5–7</a:t>
             </a:r>
           </a:p>
         </p:txBody>
@@ -5472,83 +5555,14 @@
           <a:lstStyle/>
           <a:p>
             <a:pPr lvl="0" indent="0" marL="0">
-              <a:buNone/>
-            </a:pPr>
-            <a:r>
-              <a:rPr/>
-              <a:t>Path</a:t>
-            </a:r>
-          </a:p>
-          <a:p>
-            <a:pPr lvl="0" indent="0" marL="0">
-              <a:buNone/>
-            </a:pPr>
-            <a:r>
-              <a:rPr/>
-              <a:t>Count</a:t>
-            </a:r>
-          </a:p>
-          <a:p>
-            <a:pPr lvl="0" indent="0" marL="0">
-              <a:buNone/>
-            </a:pPr>
-            <a:r>
-              <a:rPr/>
-              <a:t>Happy</a:t>
-            </a:r>
-          </a:p>
-          <a:p>
-            <a:pPr lvl="0" indent="0" marL="0">
-              <a:buNone/>
-            </a:pPr>
-            <a:r>
-              <a:rPr/>
-              <a:t>3</a:t>
-            </a:r>
-          </a:p>
-          <a:p>
-            <a:pPr lvl="0" indent="0" marL="0">
-              <a:buNone/>
-            </a:pPr>
-            <a:r>
-              <a:rPr/>
-              <a:t>Sad</a:t>
-            </a:r>
-          </a:p>
-          <a:p>
-            <a:pPr lvl="0" indent="0" marL="0">
-              <a:buNone/>
-            </a:pPr>
-            <a:r>
-              <a:rPr/>
-              <a:t>2</a:t>
-            </a:r>
-          </a:p>
-          <a:p>
-            <a:pPr lvl="0" indent="0" marL="0">
-              <a:buNone/>
-            </a:pPr>
-            <a:r>
-              <a:rPr/>
-              <a:t>Weird</a:t>
-            </a:r>
-          </a:p>
-          <a:p>
-            <a:pPr lvl="0" indent="0" marL="0">
-              <a:buNone/>
-            </a:pPr>
-            <a:r>
-              <a:rPr/>
-              <a:t>1</a:t>
-            </a:r>
-          </a:p>
-          <a:p>
-            <a:pPr lvl="0" indent="0" marL="0">
-              <a:buNone/>
-            </a:pPr>
-            <a:r>
-              <a:rPr/>
-              <a:t>Compressed = fewer ACs, not weaker ACs. Use Given/When/Then. Same 5-failure-mode discipline.</a:t>
+              <a:spcBef>
+                <a:spcPts val="3000"/>
+              </a:spcBef>
+              <a:buNone/>
+            </a:pPr>
+            <a:r>
+              <a:rPr b="1"/>
+              <a:t>Solution sketch, AC, NFRs</a:t>
             </a:r>
           </a:p>
         </p:txBody>
@@ -5595,7 +5609,7 @@
             </a:pPr>
             <a:r>
               <a:rPr/>
-              <a:t>📚 NFR Coverage (Compressed)</a:t>
+              <a:t>✅ AC Coverage (Compressed)</a:t>
             </a:r>
           </a:p>
         </p:txBody>
@@ -5620,52 +5634,79 @@
             </a:pPr>
             <a:r>
               <a:rPr/>
-              <a:t>1 Performance NFR (latency target with defense)</a:t>
-            </a:r>
-          </a:p>
-          <a:p>
-            <a:pPr lvl="0" indent="0" marL="0">
-              <a:buNone/>
-            </a:pPr>
-            <a:r>
-              <a:rPr/>
-              <a:t>1 Security NFR (auth/authz)</a:t>
-            </a:r>
-          </a:p>
-          <a:p>
-            <a:pPr lvl="0" indent="0" marL="0">
-              <a:buNone/>
-            </a:pPr>
-            <a:r>
-              <a:rPr/>
-              <a:t>1 Accessibility NFR (Web Content Accessibility Guidelines, WCAG floor)</a:t>
-            </a:r>
-          </a:p>
-          <a:p>
-            <a:pPr lvl="0" indent="0" marL="0">
-              <a:buNone/>
-            </a:pPr>
-            <a:r>
-              <a:rPr/>
-              <a:t>1 Observability NFR (the leading indicator)</a:t>
-            </a:r>
-          </a:p>
-          <a:p>
-            <a:pPr lvl="0" indent="0" marL="0">
-              <a:buNone/>
-            </a:pPr>
-            <a:r>
-              <a:rPr/>
-              <a:t>1 Compliance NFR (the regime that applies)</a:t>
-            </a:r>
-          </a:p>
-          <a:p>
-            <a:pPr lvl="0" indent="0" marL="0">
-              <a:buNone/>
-            </a:pPr>
-            <a:r>
-              <a:rPr/>
-              <a:t>Each uses the requirement / defense / verification template. Defense is non-optional.</a:t>
+              <a:t>Path</a:t>
+            </a:r>
+          </a:p>
+          <a:p>
+            <a:pPr lvl="0" indent="0" marL="0">
+              <a:buNone/>
+            </a:pPr>
+            <a:r>
+              <a:rPr/>
+              <a:t>Count</a:t>
+            </a:r>
+          </a:p>
+          <a:p>
+            <a:pPr lvl="0" indent="0" marL="0">
+              <a:buNone/>
+            </a:pPr>
+            <a:r>
+              <a:rPr/>
+              <a:t>Happy</a:t>
+            </a:r>
+          </a:p>
+          <a:p>
+            <a:pPr lvl="0" indent="0" marL="0">
+              <a:buNone/>
+            </a:pPr>
+            <a:r>
+              <a:rPr/>
+              <a:t>3</a:t>
+            </a:r>
+          </a:p>
+          <a:p>
+            <a:pPr lvl="0" indent="0" marL="0">
+              <a:buNone/>
+            </a:pPr>
+            <a:r>
+              <a:rPr/>
+              <a:t>Sad</a:t>
+            </a:r>
+          </a:p>
+          <a:p>
+            <a:pPr lvl="0" indent="0" marL="0">
+              <a:buNone/>
+            </a:pPr>
+            <a:r>
+              <a:rPr/>
+              <a:t>2</a:t>
+            </a:r>
+          </a:p>
+          <a:p>
+            <a:pPr lvl="0" indent="0" marL="0">
+              <a:buNone/>
+            </a:pPr>
+            <a:r>
+              <a:rPr/>
+              <a:t>Weird</a:t>
+            </a:r>
+          </a:p>
+          <a:p>
+            <a:pPr lvl="0" indent="0" marL="0">
+              <a:buNone/>
+            </a:pPr>
+            <a:r>
+              <a:rPr/>
+              <a:t>1</a:t>
+            </a:r>
+          </a:p>
+          <a:p>
+            <a:pPr lvl="0" indent="0" marL="0">
+              <a:buNone/>
+            </a:pPr>
+            <a:r>
+              <a:rPr/>
+              <a:t>Compressed = fewer ACs, not weaker ACs. Use Given/When/Then. Same 5-failure-mode discipline.</a:t>
             </a:r>
           </a:p>
         </p:txBody>
@@ -5712,7 +5753,7 @@
             </a:pPr>
             <a:r>
               <a:rPr/>
-              <a:t>👥 Activity 3 — PRD-Light Sections 5–7</a:t>
+              <a:t>📚 NFR Coverage (Compressed)</a:t>
             </a:r>
           </a:p>
         </p:txBody>
@@ -5733,50 +5774,56 @@
           <a:lstStyle/>
           <a:p>
             <a:pPr lvl="0" indent="0" marL="0">
-              <a:spcBef>
-                <a:spcPts val="3000"/>
-              </a:spcBef>
-              <a:buNone/>
-            </a:pPr>
-            <a:r>
-              <a:rPr b="1"/>
-              <a:t>Quads • 50 minutes</a:t>
-            </a:r>
-          </a:p>
-          <a:p>
-            <a:pPr lvl="0" indent="0" marL="0">
-              <a:buNone/>
-            </a:pPr>
-            <a:r>
-              <a:rPr/>
-              <a:t>10 min: Section 5 solution sketch (no implementation)</a:t>
-            </a:r>
-          </a:p>
-          <a:p>
-            <a:pPr lvl="0" indent="0" marL="0">
-              <a:buNone/>
-            </a:pPr>
-            <a:r>
-              <a:rPr/>
-              <a:t>25 min: Section 6 ACs (3 happy / 2 sad / 1 weird)</a:t>
-            </a:r>
-          </a:p>
-          <a:p>
-            <a:pPr lvl="0" indent="0" marL="0">
-              <a:buNone/>
-            </a:pPr>
-            <a:r>
-              <a:rPr/>
-              <a:t>15 min: Section 7 NFRs (5 categories, one each)</a:t>
-            </a:r>
-          </a:p>
-          <a:p>
-            <a:pPr lvl="0" indent="0" marL="0">
-              <a:buNone/>
-            </a:pPr>
-            <a:r>
-              <a:rPr/>
-              <a:t>⏱ 10 + 25 + 15</a:t>
+              <a:buNone/>
+            </a:pPr>
+            <a:r>
+              <a:rPr/>
+              <a:t>1 Performance NFR (latency target with defense)</a:t>
+            </a:r>
+          </a:p>
+          <a:p>
+            <a:pPr lvl="0" indent="0" marL="0">
+              <a:buNone/>
+            </a:pPr>
+            <a:r>
+              <a:rPr/>
+              <a:t>1 Security NFR (auth/authz)</a:t>
+            </a:r>
+          </a:p>
+          <a:p>
+            <a:pPr lvl="0" indent="0" marL="0">
+              <a:buNone/>
+            </a:pPr>
+            <a:r>
+              <a:rPr/>
+              <a:t>1 Accessibility NFR (Web Content Accessibility Guidelines, WCAG floor)</a:t>
+            </a:r>
+          </a:p>
+          <a:p>
+            <a:pPr lvl="0" indent="0" marL="0">
+              <a:buNone/>
+            </a:pPr>
+            <a:r>
+              <a:rPr/>
+              <a:t>1 Observability NFR (the leading indicator)</a:t>
+            </a:r>
+          </a:p>
+          <a:p>
+            <a:pPr lvl="0" indent="0" marL="0">
+              <a:buNone/>
+            </a:pPr>
+            <a:r>
+              <a:rPr/>
+              <a:t>1 Compliance NFR (the regime that applies)</a:t>
+            </a:r>
+          </a:p>
+          <a:p>
+            <a:pPr lvl="0" indent="0" marL="0">
+              <a:buNone/>
+            </a:pPr>
+            <a:r>
+              <a:rPr/>
+              <a:t>Each uses the requirement / defense / verification template. Defense is non-optional.</a:t>
             </a:r>
           </a:p>
         </p:txBody>
@@ -5823,7 +5870,7 @@
             </a:pPr>
             <a:r>
               <a:rPr/>
-              <a:t>Block 4 — AI Validation + Day-3 Plan</a:t>
+              <a:t>👥 Activity 3 — PRD-Light Sections 5–7</a:t>
             </a:r>
           </a:p>
         </p:txBody>
@@ -5851,7 +5898,43 @@
             </a:pPr>
             <a:r>
               <a:rPr b="1"/>
-              <a:t>Catch the issues; set up tomorrow’s architecture</a:t>
+              <a:t>Quads • 50 minutes</a:t>
+            </a:r>
+          </a:p>
+          <a:p>
+            <a:pPr lvl="0" indent="0" marL="0">
+              <a:buNone/>
+            </a:pPr>
+            <a:r>
+              <a:rPr/>
+              <a:t>10 min: Section 5 solution sketch (no implementation)</a:t>
+            </a:r>
+          </a:p>
+          <a:p>
+            <a:pPr lvl="0" indent="0" marL="0">
+              <a:buNone/>
+            </a:pPr>
+            <a:r>
+              <a:rPr/>
+              <a:t>25 min: Section 6 ACs (3 happy / 2 sad / 1 weird)</a:t>
+            </a:r>
+          </a:p>
+          <a:p>
+            <a:pPr lvl="0" indent="0" marL="0">
+              <a:buNone/>
+            </a:pPr>
+            <a:r>
+              <a:rPr/>
+              <a:t>15 min: Section 7 NFRs (5 categories, one each)</a:t>
+            </a:r>
+          </a:p>
+          <a:p>
+            <a:pPr lvl="0" indent="0" marL="0">
+              <a:buNone/>
+            </a:pPr>
+            <a:r>
+              <a:rPr/>
+              <a:t>⏱ 10 + 25 + 15</a:t>
             </a:r>
           </a:p>
         </p:txBody>
@@ -5898,7 +5981,7 @@
             </a:pPr>
             <a:r>
               <a:rPr/>
-              <a:t>🤖 PRD-Light Validation Prompt</a:t>
+              <a:t>Block 4 — AI Validation + Day-3 Plan</a:t>
             </a:r>
           </a:p>
         </p:txBody>
@@ -5918,25 +6001,15 @@
           <a:bodyPr/>
           <a:lstStyle/>
           <a:p>
-            <a:pPr lvl="0" indent="0">
-              <a:buNone/>
-            </a:pPr>
-            <a:r>
-              <a:rPr>
-                <a:latin typeface="Courier"/>
-              </a:rPr>
-              <a:t>Role: Senior PM reviewing a compressed PRD.
-Context: &lt;paste PRD-light Sections 1–7&gt;
-Task: Identify 5 issues:
-1. A claim that lacks evidence
-2. A goal that's actually an output
-3. A non-goal that's missing
-4. An AC that's untestable or vague
-5. An NFR that's boilerplate
-Constraints:
-- Be specific
-- Suggest a concrete fix
-Format: 5 numbered findings.</a:t>
+            <a:pPr lvl="0" indent="0" marL="0">
+              <a:spcBef>
+                <a:spcPts val="3000"/>
+              </a:spcBef>
+              <a:buNone/>
+            </a:pPr>
+            <a:r>
+              <a:rPr b="1"/>
+              <a:t>Catch the issues; set up tomorrow’s architecture</a:t>
             </a:r>
           </a:p>
         </p:txBody>
@@ -5983,7 +6056,7 @@
             </a:pPr>
             <a:r>
               <a:rPr/>
-              <a:t>📚 Day-3 Setup</a:t>
+              <a:t>🤖 PRD-Light Validation Prompt</a:t>
             </a:r>
           </a:p>
         </p:txBody>
@@ -6003,39 +6076,25 @@
           <a:bodyPr/>
           <a:lstStyle/>
           <a:p>
-            <a:pPr lvl="0" indent="0" marL="0">
-              <a:buNone/>
-            </a:pPr>
-            <a:r>
-              <a:rPr/>
-              <a:t>Plan ahead before leaving today:</a:t>
-            </a:r>
-          </a:p>
-          <a:p>
-            <a:pPr lvl="0" indent="0" marL="0">
-              <a:buNone/>
-            </a:pPr>
-            <a:r>
-              <a:rPr/>
-              <a:t>3 architectural questions a senior architect would ask reading PRD-light</a:t>
-            </a:r>
-          </a:p>
-          <a:p>
-            <a:pPr lvl="0" indent="0" marL="0">
-              <a:buNone/>
-            </a:pPr>
-            <a:r>
-              <a:rPr/>
-              <a:t>Integration map sketch — systems / data / APIs in scope</a:t>
-            </a:r>
-          </a:p>
-          <a:p>
-            <a:pPr lvl="0" indent="0" marL="0">
-              <a:buNone/>
-            </a:pPr>
-            <a:r>
-              <a:rPr/>
-              <a:t>Critical path — what must ship by EOD tomorrow vs Thursday?</a:t>
+            <a:pPr lvl="0" indent="0">
+              <a:buNone/>
+            </a:pPr>
+            <a:r>
+              <a:rPr>
+                <a:latin typeface="Courier"/>
+              </a:rPr>
+              <a:t>Role: Senior PM reviewing a compressed PRD.
+Context: &lt;paste PRD-light Sections 1–7&gt;
+Task: Identify 5 issues:
+1. A claim that lacks evidence
+2. A goal that's actually an output
+3. A non-goal that's missing
+4. An AC that's untestable or vague
+5. An NFR that's boilerplate
+Constraints:
+- Be specific
+- Suggest a concrete fix
+Format: 5 numbered findings.</a:t>
             </a:r>
           </a:p>
         </p:txBody>
@@ -6082,7 +6141,7 @@
             </a:pPr>
             <a:r>
               <a:rPr/>
-              <a:t>👥 Activity 4 — Validation + Day-3 Plan</a:t>
+              <a:t>📚 Day-3 Setup</a:t>
             </a:r>
           </a:p>
         </p:txBody>
@@ -6103,50 +6162,38 @@
           <a:lstStyle/>
           <a:p>
             <a:pPr lvl="0" indent="0" marL="0">
-              <a:spcBef>
-                <a:spcPts val="3000"/>
-              </a:spcBef>
-              <a:buNone/>
-            </a:pPr>
-            <a:r>
-              <a:rPr b="1"/>
-              <a:t>Quads • 55 minutes • Wrap</a:t>
-            </a:r>
-          </a:p>
-          <a:p>
-            <a:pPr lvl="0" indent="0" marL="0">
-              <a:buNone/>
-            </a:pPr>
-            <a:r>
-              <a:rPr/>
-              <a:t>15 min: AI validation pass (adopt / defer / reject)</a:t>
-            </a:r>
-          </a:p>
-          <a:p>
-            <a:pPr lvl="0" indent="0" marL="0">
-              <a:buNone/>
-            </a:pPr>
-            <a:r>
-              <a:rPr/>
-              <a:t>10 min: update PRD-light + provenance log</a:t>
-            </a:r>
-          </a:p>
-          <a:p>
-            <a:pPr lvl="0" indent="0" marL="0">
-              <a:buNone/>
-            </a:pPr>
-            <a:r>
-              <a:rPr/>
-              <a:t>30 min: Day-3 plan (3 architecture questions, integration sketch, critical path)</a:t>
-            </a:r>
-          </a:p>
-          <a:p>
-            <a:pPr lvl="0" indent="0" marL="0">
-              <a:buNone/>
-            </a:pPr>
-            <a:r>
-              <a:rPr/>
-              <a:t>⏱ 15 + 10 + 30 · 15-min wrap</a:t>
+              <a:buNone/>
+            </a:pPr>
+            <a:r>
+              <a:rPr/>
+              <a:t>Plan ahead before leaving today:</a:t>
+            </a:r>
+          </a:p>
+          <a:p>
+            <a:pPr lvl="0" indent="0" marL="0">
+              <a:buNone/>
+            </a:pPr>
+            <a:r>
+              <a:rPr/>
+              <a:t>3 architectural questions a senior architect would ask reading PRD-light</a:t>
+            </a:r>
+          </a:p>
+          <a:p>
+            <a:pPr lvl="0" indent="0" marL="0">
+              <a:buNone/>
+            </a:pPr>
+            <a:r>
+              <a:rPr/>
+              <a:t>Integration map sketch — systems / data / APIs in scope</a:t>
+            </a:r>
+          </a:p>
+          <a:p>
+            <a:pPr lvl="0" indent="0" marL="0">
+              <a:buNone/>
+            </a:pPr>
+            <a:r>
+              <a:rPr/>
+              <a:t>Critical path — what must ship by EOD tomorrow vs Thursday?</a:t>
             </a:r>
           </a:p>
         </p:txBody>
@@ -6268,7 +6315,7 @@
             </a:pPr>
             <a:r>
               <a:rPr/>
-              <a:t>🎉 Day 2 Wrap</a:t>
+              <a:t>👥 Activity 4 — Validation + Day-3 Plan</a:t>
             </a:r>
           </a:p>
         </p:txBody>
@@ -6289,92 +6336,50 @@
           <a:lstStyle/>
           <a:p>
             <a:pPr lvl="0" indent="0" marL="0">
-              <a:buNone/>
-            </a:pPr>
-            <a:r>
-              <a:rPr/>
-              <a:t>What we built</a:t>
-            </a:r>
-          </a:p>
-          <a:p>
-            <a:pPr lvl="0" indent="0" marL="0">
-              <a:buNone/>
-            </a:pPr>
-            <a:r>
-              <a:rPr/>
-              <a:t>Discovery summary (1 page)</a:t>
-            </a:r>
-          </a:p>
-          <a:p>
-            <a:pPr lvl="0" indent="0" marL="0">
-              <a:buNone/>
-            </a:pPr>
-            <a:r>
-              <a:rPr/>
-              <a:t>PRD-light Sections 1–7 (2 pages)</a:t>
-            </a:r>
-          </a:p>
-          <a:p>
-            <a:pPr lvl="0" indent="0" marL="0">
-              <a:buNone/>
-            </a:pPr>
-            <a:r>
-              <a:rPr/>
-              <a:t>AI validation pass</a:t>
-            </a:r>
-          </a:p>
-          <a:p>
-            <a:pPr lvl="0" indent="0" marL="0">
-              <a:buNone/>
-            </a:pPr>
-            <a:r>
-              <a:rPr/>
-              <a:t>Day-3 plan</a:t>
-            </a:r>
-          </a:p>
-          <a:p>
-            <a:pPr lvl="0" indent="0" marL="0">
-              <a:buNone/>
-            </a:pPr>
-            <a:r>
-              <a:rPr/>
-              <a:t>What opens tomorrow</a:t>
-            </a:r>
-          </a:p>
-          <a:p>
-            <a:pPr lvl="0" indent="0" marL="0">
-              <a:buNone/>
-            </a:pPr>
-            <a:r>
-              <a:rPr/>
-              <a:t>Capstone architecture + AI Spec drafted</a:t>
-            </a:r>
-          </a:p>
-          <a:p>
-            <a:pPr lvl="0" indent="0" marL="0">
-              <a:buNone/>
-            </a:pPr>
-            <a:r>
-              <a:rPr/>
-              <a:t>Technical Concept Document (TCD-light) + Technical Modeling Document (TMD-light)</a:t>
-            </a:r>
-          </a:p>
-          <a:p>
-            <a:pPr lvl="0" indent="0" marL="0">
-              <a:buNone/>
-            </a:pPr>
-            <a:r>
-              <a:rPr/>
-              <a:t>5-prompt sequence on the capstone</a:t>
-            </a:r>
-          </a:p>
-          <a:p>
-            <a:pPr lvl="0" indent="0" marL="0">
-              <a:buNone/>
-            </a:pPr>
-            <a:r>
-              <a:rPr/>
-              <a:t>Bring to Day 3: PRD-light + Day-3 plan. Tomorrow we go architectural.</a:t>
+              <a:spcBef>
+                <a:spcPts val="3000"/>
+              </a:spcBef>
+              <a:buNone/>
+            </a:pPr>
+            <a:r>
+              <a:rPr b="1"/>
+              <a:t>Quads • 55 minutes • Wrap</a:t>
+            </a:r>
+          </a:p>
+          <a:p>
+            <a:pPr lvl="0" indent="0" marL="0">
+              <a:buNone/>
+            </a:pPr>
+            <a:r>
+              <a:rPr/>
+              <a:t>15 min: AI validation pass (adopt / defer / reject)</a:t>
+            </a:r>
+          </a:p>
+          <a:p>
+            <a:pPr lvl="0" indent="0" marL="0">
+              <a:buNone/>
+            </a:pPr>
+            <a:r>
+              <a:rPr/>
+              <a:t>10 min: update PRD-light + provenance log</a:t>
+            </a:r>
+          </a:p>
+          <a:p>
+            <a:pPr lvl="0" indent="0" marL="0">
+              <a:buNone/>
+            </a:pPr>
+            <a:r>
+              <a:rPr/>
+              <a:t>30 min: Day-3 plan (3 architecture questions, integration sketch, critical path)</a:t>
+            </a:r>
+          </a:p>
+          <a:p>
+            <a:pPr lvl="0" indent="0" marL="0">
+              <a:buNone/>
+            </a:pPr>
+            <a:r>
+              <a:rPr/>
+              <a:t>⏱ 15 + 10 + 30 · 15-min wrap</a:t>
             </a:r>
           </a:p>
         </p:txBody>
@@ -6421,6 +6426,159 @@
             </a:pPr>
             <a:r>
               <a:rPr/>
+              <a:t>🎉 Day 2 Wrap</a:t>
+            </a:r>
+          </a:p>
+        </p:txBody>
+      </p:sp>
+      <p:sp>
+        <p:nvSpPr>
+          <p:cNvPr id="3" name="Content Placeholder 2"/>
+          <p:cNvSpPr>
+            <a:spLocks noGrp="1"/>
+          </p:cNvSpPr>
+          <p:nvPr>
+            <p:ph idx="1"/>
+          </p:nvPr>
+        </p:nvSpPr>
+        <p:spPr/>
+        <p:txBody>
+          <a:bodyPr/>
+          <a:lstStyle/>
+          <a:p>
+            <a:pPr lvl="0" indent="0" marL="0">
+              <a:buNone/>
+            </a:pPr>
+            <a:r>
+              <a:rPr/>
+              <a:t>What we built</a:t>
+            </a:r>
+          </a:p>
+          <a:p>
+            <a:pPr lvl="0" indent="0" marL="0">
+              <a:buNone/>
+            </a:pPr>
+            <a:r>
+              <a:rPr/>
+              <a:t>Discovery summary (1 page)</a:t>
+            </a:r>
+          </a:p>
+          <a:p>
+            <a:pPr lvl="0" indent="0" marL="0">
+              <a:buNone/>
+            </a:pPr>
+            <a:r>
+              <a:rPr/>
+              <a:t>PRD-light Sections 1–7 (2 pages)</a:t>
+            </a:r>
+          </a:p>
+          <a:p>
+            <a:pPr lvl="0" indent="0" marL="0">
+              <a:buNone/>
+            </a:pPr>
+            <a:r>
+              <a:rPr/>
+              <a:t>AI validation pass</a:t>
+            </a:r>
+          </a:p>
+          <a:p>
+            <a:pPr lvl="0" indent="0" marL="0">
+              <a:buNone/>
+            </a:pPr>
+            <a:r>
+              <a:rPr/>
+              <a:t>Day-3 plan</a:t>
+            </a:r>
+          </a:p>
+          <a:p>
+            <a:pPr lvl="0" indent="0" marL="0">
+              <a:buNone/>
+            </a:pPr>
+            <a:r>
+              <a:rPr/>
+              <a:t>What opens tomorrow</a:t>
+            </a:r>
+          </a:p>
+          <a:p>
+            <a:pPr lvl="0" indent="0" marL="0">
+              <a:buNone/>
+            </a:pPr>
+            <a:r>
+              <a:rPr/>
+              <a:t>Capstone architecture + AI Spec drafted</a:t>
+            </a:r>
+          </a:p>
+          <a:p>
+            <a:pPr lvl="0" indent="0" marL="0">
+              <a:buNone/>
+            </a:pPr>
+            <a:r>
+              <a:rPr/>
+              <a:t>Technical Concept Document (TCD-light) + Technical Modeling Document (TMD-light)</a:t>
+            </a:r>
+          </a:p>
+          <a:p>
+            <a:pPr lvl="0" indent="0" marL="0">
+              <a:buNone/>
+            </a:pPr>
+            <a:r>
+              <a:rPr/>
+              <a:t>5-prompt sequence on the capstone</a:t>
+            </a:r>
+          </a:p>
+          <a:p>
+            <a:pPr lvl="0" indent="0" marL="0">
+              <a:buNone/>
+            </a:pPr>
+            <a:r>
+              <a:rPr/>
+              <a:t>Bring to Day 3: PRD-light + Day-3 plan. Tomorrow we go architectural.</a:t>
+            </a:r>
+          </a:p>
+        </p:txBody>
+      </p:sp>
+    </p:spTree>
+  </p:cSld>
+</p:sld>
+</file>
+
+<file path=ppt/slides/slide22.xml><?xml version="1.0" encoding="utf-8"?>
+<p:sld xmlns:a="http://schemas.openxmlformats.org/drawingml/2006/main" xmlns:r="http://schemas.openxmlformats.org/officeDocument/2006/relationships" xmlns:p="http://schemas.openxmlformats.org/presentationml/2006/main">
+  <p:cSld>
+    <p:spTree>
+      <p:nvGrpSpPr>
+        <p:cNvPr id="1" name=""/>
+        <p:cNvGrpSpPr/>
+        <p:nvPr/>
+      </p:nvGrpSpPr>
+      <p:grpSpPr>
+        <a:xfrm>
+          <a:off x="0" y="0"/>
+          <a:ext cx="0" cy="0"/>
+          <a:chOff x="0" y="0"/>
+          <a:chExt cx="0" cy="0"/>
+        </a:xfrm>
+      </p:grpSpPr>
+      <p:sp>
+        <p:nvSpPr>
+          <p:cNvPr id="2" name="Title 1"/>
+          <p:cNvSpPr>
+            <a:spLocks noGrp="1"/>
+          </p:cNvSpPr>
+          <p:nvPr>
+            <p:ph type="title"/>
+          </p:nvPr>
+        </p:nvSpPr>
+        <p:spPr/>
+        <p:txBody>
+          <a:bodyPr/>
+          <a:lstStyle/>
+          <a:p>
+            <a:pPr lvl="0" indent="0" marL="0">
+              <a:buNone/>
+            </a:pPr>
+            <a:r>
+              <a:rPr/>
               <a:t>💬 Questions &amp; Reflection</a:t>
             </a:r>
           </a:p>
@@ -7048,7 +7206,7 @@
             </a:pPr>
             <a:r>
               <a:rPr/>
-              <a:t>📚 Compressed Persona</a:t>
+              <a:t>🔍 Ground in Customer Signal</a:t>
             </a:r>
           </a:p>
         </p:txBody>
@@ -7068,26 +7226,93 @@
           <a:bodyPr/>
           <a:lstStyle/>
           <a:p>
-            <a:pPr lvl="0" indent="0">
-              <a:buNone/>
-            </a:pPr>
-            <a:r>
-              <a:rPr>
-                <a:latin typeface="Courier"/>
-              </a:rPr>
-              <a:t>**Persona:** &lt;role + segment&gt;
-**Job-to-be-done:** &lt;verb-based, in their language&gt;
-**Why it's hard today:** &lt;specific friction; quote a real customer
-if possible&gt;</a:t>
-            </a:r>
-          </a:p>
-          <a:p>
-            <a:pPr lvl="0" indent="0" marL="0">
-              <a:buNone/>
-            </a:pPr>
-            <a:r>
-              <a:rPr/>
-              <a:t>Worked example: “Persona: New B2B finance ops associate at a 200-person company. JTBD: Close the books each month without staying late on Friday. Why hard: ‘I spend Thursday night chasing 4 different teams for missing accruals — by the time they respond, I’ve forgotten what I asked.’”</a:t>
+            <a:pPr lvl="0" indent="0" marL="0">
+              <a:buNone/>
+            </a:pPr>
+            <a:r>
+              <a:rPr/>
+              <a:t>Pool your discovery into three buckets — start from the Discovery Signal Pack, then add what you confirm firsthand with the real stakeholders.</a:t>
+            </a:r>
+          </a:p>
+          <a:p>
+            <a:pPr lvl="0" indent="0" marL="0">
+              <a:buNone/>
+            </a:pPr>
+            <a:r>
+              <a:rPr/>
+              <a:t>Bucket</a:t>
+            </a:r>
+          </a:p>
+          <a:p>
+            <a:pPr lvl="0" indent="0" marL="0">
+              <a:buNone/>
+            </a:pPr>
+            <a:r>
+              <a:rPr/>
+              <a:t>What goes here</a:t>
+            </a:r>
+          </a:p>
+          <a:p>
+            <a:pPr lvl="0" indent="0" marL="0">
+              <a:buNone/>
+            </a:pPr>
+            <a:r>
+              <a:rPr/>
+              <a:t>Direct signal</a:t>
+            </a:r>
+          </a:p>
+          <a:p>
+            <a:pPr lvl="0" indent="0" marL="0">
+              <a:buNone/>
+            </a:pPr>
+            <a:r>
+              <a:rPr/>
+              <a:t>Interviews, support tickets, observation, usage data</a:t>
+            </a:r>
+          </a:p>
+          <a:p>
+            <a:pPr lvl="0" indent="0" marL="0">
+              <a:buNone/>
+            </a:pPr>
+            <a:r>
+              <a:rPr/>
+              <a:t>Indirect signal</a:t>
+            </a:r>
+          </a:p>
+          <a:p>
+            <a:pPr lvl="0" indent="0" marL="0">
+              <a:buNone/>
+            </a:pPr>
+            <a:r>
+              <a:rPr/>
+              <a:t>Public reviews, competitor analysis, internal Slack</a:t>
+            </a:r>
+          </a:p>
+          <a:p>
+            <a:pPr lvl="0" indent="0" marL="0">
+              <a:buNone/>
+            </a:pPr>
+            <a:r>
+              <a:rPr/>
+              <a:t>What’s missing</a:t>
+            </a:r>
+          </a:p>
+          <a:p>
+            <a:pPr lvl="0" indent="0" marL="0">
+              <a:buNone/>
+            </a:pPr>
+            <a:r>
+              <a:rPr/>
+              <a:t>Be honest — the open questions to confirm with stakeholders</a:t>
+            </a:r>
+          </a:p>
+          <a:p>
+            <a:pPr lvl="0" indent="0" marL="0">
+              <a:buNone/>
+            </a:pPr>
+            <a:r>
+              <a:rPr/>
+              <a:t>Do not invent customer signal — ground every claim in the pack or a source you confirm.</a:t>
             </a:r>
           </a:p>
         </p:txBody>
@@ -7134,7 +7359,7 @@
             </a:pPr>
             <a:r>
               <a:rPr/>
-              <a:t>👥 Activity 1 — Compressed Discovery</a:t>
+              <a:t>📚 Compressed Persona</a:t>
             </a:r>
           </a:p>
         </p:txBody>
@@ -7154,60 +7379,26 @@
           <a:bodyPr/>
           <a:lstStyle/>
           <a:p>
-            <a:pPr lvl="0" indent="0" marL="0">
-              <a:spcBef>
-                <a:spcPts val="3000"/>
-              </a:spcBef>
-              <a:buNone/>
-            </a:pPr>
-            <a:r>
-              <a:rPr b="1"/>
-              <a:t>Quads • 45 minutes</a:t>
-            </a:r>
-          </a:p>
-          <a:p>
-            <a:pPr lvl="0" indent="0" marL="0">
-              <a:buNone/>
-            </a:pPr>
-            <a:r>
-              <a:rPr/>
-              <a:t>20 min: synthesize gathered inputs</a:t>
-            </a:r>
-          </a:p>
-          <a:p>
-            <a:pPr lvl="0" indent="0" marL="0">
-              <a:buNone/>
-            </a:pPr>
-            <a:r>
-              <a:rPr/>
-              <a:t>10 min: name persona / JTBD / why hard</a:t>
-            </a:r>
-          </a:p>
-          <a:p>
-            <a:pPr lvl="0" indent="0" marL="0">
-              <a:buNone/>
-            </a:pPr>
-            <a:r>
-              <a:rPr/>
-              <a:t>10 min: top 3 pains scored on severity / frequency / addressability</a:t>
-            </a:r>
-          </a:p>
-          <a:p>
-            <a:pPr lvl="0" indent="0" marL="0">
-              <a:buNone/>
-            </a:pPr>
-            <a:r>
-              <a:rPr/>
-              <a:t>5 min: sanity check — does this sound like a real customer?</a:t>
-            </a:r>
-          </a:p>
-          <a:p>
-            <a:pPr lvl="0" indent="0" marL="0">
-              <a:buNone/>
-            </a:pPr>
-            <a:r>
-              <a:rPr/>
-              <a:t>⏱ 20 + 10 + 10 + 5</a:t>
+            <a:pPr lvl="0" indent="0">
+              <a:buNone/>
+            </a:pPr>
+            <a:r>
+              <a:rPr>
+                <a:latin typeface="Courier"/>
+              </a:rPr>
+              <a:t>**Persona:** &lt;role + segment&gt;
+**Job-to-be-done:** &lt;verb-based, in their language&gt;
+**Why it's hard today:** &lt;specific friction; quote a real customer
+if possible&gt;</a:t>
+            </a:r>
+          </a:p>
+          <a:p>
+            <a:pPr lvl="0" indent="0" marL="0">
+              <a:buNone/>
+            </a:pPr>
+            <a:r>
+              <a:rPr/>
+              <a:t>Worked example: “Persona: New B2B finance ops associate at a 200-person company. JTBD: Close the books each month without staying late on Friday. Why hard: ‘I spend Thursday night chasing 4 different teams for missing accruals — by the time they respond, I’ve forgotten what I asked.’”</a:t>
             </a:r>
           </a:p>
         </p:txBody>
@@ -7254,7 +7445,7 @@
             </a:pPr>
             <a:r>
               <a:rPr/>
-              <a:t>Block 2 — PRD-Light Sections 1–4</a:t>
+              <a:t>👥 Activity 1 — Compressed Discovery</a:t>
             </a:r>
           </a:p>
         </p:txBody>
@@ -7282,7 +7473,52 @@
             </a:pPr>
             <a:r>
               <a:rPr b="1"/>
-              <a:t>Context, Problem, Goals/Non-goals, Scope</a:t>
+              <a:t>Quads • 45 minutes</a:t>
+            </a:r>
+          </a:p>
+          <a:p>
+            <a:pPr lvl="0" indent="0" marL="0">
+              <a:buNone/>
+            </a:pPr>
+            <a:r>
+              <a:rPr/>
+              <a:t>20 min: synthesize gathered inputs</a:t>
+            </a:r>
+          </a:p>
+          <a:p>
+            <a:pPr lvl="0" indent="0" marL="0">
+              <a:buNone/>
+            </a:pPr>
+            <a:r>
+              <a:rPr/>
+              <a:t>10 min: name persona / JTBD / why hard</a:t>
+            </a:r>
+          </a:p>
+          <a:p>
+            <a:pPr lvl="0" indent="0" marL="0">
+              <a:buNone/>
+            </a:pPr>
+            <a:r>
+              <a:rPr/>
+              <a:t>10 min: top 3 pains scored on severity / frequency / addressability</a:t>
+            </a:r>
+          </a:p>
+          <a:p>
+            <a:pPr lvl="0" indent="0" marL="0">
+              <a:buNone/>
+            </a:pPr>
+            <a:r>
+              <a:rPr/>
+              <a:t>5 min: sanity check — does this sound like a real customer?</a:t>
+            </a:r>
+          </a:p>
+          <a:p>
+            <a:pPr lvl="0" indent="0" marL="0">
+              <a:buNone/>
+            </a:pPr>
+            <a:r>
+              <a:rPr/>
+              <a:t>⏱ 20 + 10 + 10 + 5</a:t>
             </a:r>
           </a:p>
         </p:txBody>
